--- a/slides/2026 Hackathon Chimpanzee!!!.pptx
+++ b/slides/2026 Hackathon Chimpanzee!!!.pptx
@@ -6078,7 +6078,13 @@
         <p:nvGraphicFramePr>
           <p:cNvPr id="55" name="Google Shape;55;p13"/>
           <p:cNvGraphicFramePr/>
-          <p:nvPr/>
+          <p:nvPr>
+            <p:extLst>
+              <p:ext uri="{D42A27DB-BD31-4B8C-83A1-F6EECF244321}">
+                <p14:modId xmlns:p14="http://schemas.microsoft.com/office/powerpoint/2010/main" val="2146921738"/>
+              </p:ext>
+            </p:extLst>
+          </p:nvPr>
         </p:nvGraphicFramePr>
         <p:xfrm>
           <a:off x="7412050" y="1514225"/>
@@ -6189,10 +6195,32 @@
                         <a:buNone/>
                       </a:pPr>
                       <a:r>
-                        <a:rPr lang="en" sz="1000" b="1"/>
-                        <a:t>Numrah Fadra</a:t>
+                        <a:rPr lang="en" sz="1000" b="1" dirty="0" err="1">
+                          <a:solidFill>
+                            <a:schemeClr val="accent1">
+                              <a:lumMod val="75000"/>
+                            </a:schemeClr>
+                          </a:solidFill>
+                        </a:rPr>
+                        <a:t>Numrah</a:t>
                       </a:r>
-                      <a:endParaRPr sz="1000" b="1"/>
+                      <a:r>
+                        <a:rPr lang="en" sz="1000" b="1" dirty="0">
+                          <a:solidFill>
+                            <a:schemeClr val="accent1">
+                              <a:lumMod val="75000"/>
+                            </a:schemeClr>
+                          </a:solidFill>
+                        </a:rPr>
+                        <a:t> Fadra</a:t>
+                      </a:r>
+                      <a:endParaRPr sz="1000" b="1" dirty="0">
+                        <a:solidFill>
+                          <a:schemeClr val="accent1">
+                            <a:lumMod val="75000"/>
+                          </a:schemeClr>
+                        </a:solidFill>
+                      </a:endParaRPr>
                     </a:p>
                   </a:txBody>
                   <a:tcPr marL="28575" marR="28575" marT="19050" marB="19050" anchor="b">
@@ -6329,10 +6357,32 @@
                         <a:buNone/>
                       </a:pPr>
                       <a:r>
-                        <a:rPr lang="en" sz="1000" b="1"/>
-                        <a:t>Muteeba Azhar</a:t>
+                        <a:rPr lang="en" sz="1000" b="1" dirty="0" err="1">
+                          <a:solidFill>
+                            <a:schemeClr val="accent1">
+                              <a:lumMod val="75000"/>
+                            </a:schemeClr>
+                          </a:solidFill>
+                        </a:rPr>
+                        <a:t>Muteeba</a:t>
                       </a:r>
-                      <a:endParaRPr sz="1000" b="1"/>
+                      <a:r>
+                        <a:rPr lang="en" sz="1000" b="1" dirty="0">
+                          <a:solidFill>
+                            <a:schemeClr val="accent1">
+                              <a:lumMod val="75000"/>
+                            </a:schemeClr>
+                          </a:solidFill>
+                        </a:rPr>
+                        <a:t> Azhar</a:t>
+                      </a:r>
+                      <a:endParaRPr sz="1000" b="1" dirty="0">
+                        <a:solidFill>
+                          <a:schemeClr val="accent1">
+                            <a:lumMod val="75000"/>
+                          </a:schemeClr>
+                        </a:solidFill>
+                      </a:endParaRPr>
                     </a:p>
                   </a:txBody>
                   <a:tcPr marL="28575" marR="28575" marT="19050" marB="19050" anchor="b">
@@ -6399,10 +6449,32 @@
                         <a:buNone/>
                       </a:pPr>
                       <a:r>
-                        <a:rPr lang="en" sz="1000" b="1"/>
-                        <a:t>Nilabja Bhattacharjee</a:t>
+                        <a:rPr lang="en" sz="1000" b="1" dirty="0" err="1">
+                          <a:solidFill>
+                            <a:schemeClr val="accent1">
+                              <a:lumMod val="75000"/>
+                            </a:schemeClr>
+                          </a:solidFill>
+                        </a:rPr>
+                        <a:t>Nilabja</a:t>
                       </a:r>
-                      <a:endParaRPr sz="1000" b="1"/>
+                      <a:r>
+                        <a:rPr lang="en" sz="1000" b="1" dirty="0">
+                          <a:solidFill>
+                            <a:schemeClr val="accent1">
+                              <a:lumMod val="75000"/>
+                            </a:schemeClr>
+                          </a:solidFill>
+                        </a:rPr>
+                        <a:t> Bhattacharjee</a:t>
+                      </a:r>
+                      <a:endParaRPr sz="1000" b="1" dirty="0">
+                        <a:solidFill>
+                          <a:schemeClr val="accent1">
+                            <a:lumMod val="75000"/>
+                          </a:schemeClr>
+                        </a:solidFill>
+                      </a:endParaRPr>
                     </a:p>
                   </a:txBody>
                   <a:tcPr marL="28575" marR="28575" marT="19050" marB="19050" anchor="b">
@@ -6819,10 +6891,22 @@
                         <a:buNone/>
                       </a:pPr>
                       <a:r>
-                        <a:rPr lang="en" sz="1000" b="1"/>
+                        <a:rPr lang="en" sz="1000" b="1" dirty="0">
+                          <a:solidFill>
+                            <a:schemeClr val="accent1">
+                              <a:lumMod val="75000"/>
+                            </a:schemeClr>
+                          </a:solidFill>
+                        </a:rPr>
                         <a:t>Rajarshi Mondal</a:t>
                       </a:r>
-                      <a:endParaRPr sz="1000" b="1"/>
+                      <a:endParaRPr sz="1000" b="1" dirty="0">
+                        <a:solidFill>
+                          <a:schemeClr val="accent1">
+                            <a:lumMod val="75000"/>
+                          </a:schemeClr>
+                        </a:solidFill>
+                      </a:endParaRPr>
                     </a:p>
                   </a:txBody>
                   <a:tcPr marL="28575" marR="28575" marT="19050" marB="19050" anchor="b">
